--- a/ppt/SURYA-AGENT-Round1.pptx
+++ b/ppt/SURYA-AGENT-Round1.pptx
@@ -121,53 +121,53 @@
   <p:extLst>
     <p:ext uri="{521415D9-36F7-43E2-AB2F-B90AF26B5E84}">
       <p14:sectionLst xmlns:p14="http://schemas.microsoft.com/office/powerpoint/2010/main">
-        <p14:section name="Opening" id="{edf32ef1-c689-c78d-fb04-3002e5d03233}">
+        <p14:section name="Opening" id="{3ca58df0-116f-d320-3db1-ec179532eed9}">
           <p14:sldIdLst>
             <p14:sldId id="256"/>
           </p14:sldIdLst>
         </p14:section>
-        <p14:section name="1 Problem" id="{f1b5cc30-cf3d-be8c-0e52-4819715dd2f8}">
+        <p14:section name="1 Problem" id="{3385b83f-35f0-063f-c01b-8ef1810823cc}">
           <p14:sldIdLst>
             <p14:sldId id="257"/>
           </p14:sldIdLst>
         </p14:section>
-        <p14:section name="2 Gaps" id="{25f0b62c-e2f9-0542-b1c4-e762e88effe4}">
+        <p14:section name="2 Gaps" id="{063d85a5-f5b6-d7df-14db-6ee4acbb8cd7}">
           <p14:sldIdLst>
             <p14:sldId id="258"/>
           </p14:sldIdLst>
         </p14:section>
-        <p14:section name="3 Solution" id="{8996dd77-ffe4-8249-fd02-4b9cde201f3f}">
+        <p14:section name="3 Solution" id="{4eac6ca0-da95-7543-7d27-b3f80f5b198b}">
           <p14:sldIdLst>
             <p14:sldId id="259"/>
             <p14:sldId id="260"/>
             <p14:sldId id="261"/>
           </p14:sldIdLst>
         </p14:section>
-        <p14:section name="4 Innovation" id="{1a6a16e3-7ac3-6152-979d-35c5cc133073}">
+        <p14:section name="4 Innovation" id="{4eec429c-e0eb-6307-5fe6-32c234004dc7}">
           <p14:sldIdLst>
             <p14:sldId id="262"/>
             <p14:sldId id="263"/>
             <p14:sldId id="264"/>
           </p14:sldIdLst>
         </p14:section>
-        <p14:section name="5 Impact" id="{4a49b9b1-ef29-5997-5ea0-a32561b9858c}">
+        <p14:section name="5 Impact" id="{e8e1ff4e-9dd2-574b-28dc-0e85f35a2771}">
           <p14:sldIdLst>
             <p14:sldId id="265"/>
           </p14:sldIdLst>
         </p14:section>
-        <p14:section name="6 Prototype" id="{7e687d26-f32a-c2ae-28b9-b836c52c788b}">
+        <p14:section name="6 Prototype" id="{597b1dc9-d57c-9106-4293-a088163aa9b8}">
           <p14:sldIdLst>
             <p14:sldId id="266"/>
             <p14:sldId id="267"/>
             <p14:sldId id="268"/>
           </p14:sldIdLst>
         </p14:section>
-        <p14:section name="7 Future" id="{6a97f725-7644-7875-86fb-2f91e64dcd81}">
+        <p14:section name="7 Future" id="{bfda0046-abcf-af49-d363-8ee60e87ead9}">
           <p14:sldIdLst>
             <p14:sldId id="269"/>
           </p14:sldIdLst>
         </p14:section>
-        <p14:section name="Declarations" id="{164a0e96-0271-d2b8-7157-3ad6f3c8aff9}">
+        <p14:section name="Declarations" id="{55983d26-16a3-3d2c-3e99-df30be67030f}">
           <p14:sldIdLst>
             <p14:sldId id="270"/>
           </p14:sldIdLst>
